--- a/builder/assets/reference-pages/hr-ticket-classification.pptx
+++ b/builder/assets/reference-pages/hr-ticket-classification.pptx
@@ -1097,7 +1097,7 @@
                   <a:srgbClr val="15375F"/>
                 </a:solidFill>
               </a:rPr>
-              <a:t>分类准确率 86.5%、改判率 13.5%，其他标签把工单推向二次分派</a:t>
+              <a:t>Classification accuracy 86.5%, modification rate 13.5%, other tags push the work order to secondary dispatch</a:t>
             </a:r>
           </a:p>
         </p:txBody>
@@ -1151,7 +1151,7 @@
                   <a:srgbClr val="E8872D"/>
                 </a:solidFill>
               </a:rPr>
-              <a:t>分类准确率</a:t>
+              <a:t>Classification accuracy</a:t>
             </a:r>
           </a:p>
           <a:p xmlns:a="http://schemas.openxmlformats.org/drawingml/2006/main">
@@ -1185,7 +1185,7 @@
                   <a:srgbClr val="E8872D"/>
                 </a:solidFill>
               </a:rPr>
-              <a:t>目标 92%</a:t>
+              <a:t>target 92%</a:t>
             </a:r>
           </a:p>
         </p:txBody>
@@ -1239,7 +1239,7 @@
                   <a:srgbClr val="15375F"/>
                 </a:solidFill>
               </a:rPr>
-              <a:t>改判率</a:t>
+              <a:t>Correction rate</a:t>
             </a:r>
           </a:p>
           <a:p xmlns:a="http://schemas.openxmlformats.org/drawingml/2006/main">
@@ -1273,7 +1273,7 @@
                   <a:srgbClr val="15375F"/>
                 </a:solidFill>
               </a:rPr>
-              <a:t>目标 &lt;8%</a:t>
+              <a:t>target &lt;8%</a:t>
             </a:r>
           </a:p>
         </p:txBody>
@@ -1327,7 +1327,7 @@
                   <a:srgbClr val="15375F"/>
                 </a:solidFill>
               </a:rPr>
-              <a:t>其他标签占比</a:t>
+              <a:t>Proportion of other tags</a:t>
             </a:r>
           </a:p>
           <a:p xmlns:a="http://schemas.openxmlformats.org/drawingml/2006/main">
@@ -1361,7 +1361,7 @@
                   <a:srgbClr val="15375F"/>
                 </a:solidFill>
               </a:rPr>
-              <a:t>目标 &lt;5%</a:t>
+              <a:t>target &lt;5%</a:t>
             </a:r>
           </a:p>
         </p:txBody>
@@ -1446,7 +1446,7 @@
                   <a:srgbClr val="15375F"/>
                 </a:solidFill>
               </a:rPr>
-              <a:t>模型输入                      AI 初分                     最终分类</a:t>
+              <a:t>Model input                      AI first division                     final classification</a:t>
             </a:r>
           </a:p>
         </p:txBody>
@@ -1502,7 +1502,7 @@
                   <a:srgbClr val="15375F"/>
                 </a:solidFill>
               </a:rPr>
-              <a:t>薪资</a:t>
+              <a:t>salary</a:t>
             </a:r>
           </a:p>
           <a:p xmlns:a="http://schemas.openxmlformats.org/drawingml/2006/main">
@@ -1592,7 +1592,7 @@
                   <a:srgbClr val="15375F"/>
                 </a:solidFill>
               </a:rPr>
-              <a:t>改判 90</a:t>
+              <a:t>Change the sentence 90</a:t>
             </a:r>
           </a:p>
         </p:txBody>
@@ -1648,7 +1648,7 @@
                   <a:srgbClr val="15375F"/>
                 </a:solidFill>
               </a:rPr>
-              <a:t>薪资</a:t>
+              <a:t>salary</a:t>
             </a:r>
           </a:p>
           <a:p xmlns:a="http://schemas.openxmlformats.org/drawingml/2006/main">
@@ -1721,7 +1721,7 @@
                   <a:srgbClr val="15375F"/>
                 </a:solidFill>
               </a:rPr>
-              <a:t>福利</a:t>
+              <a:t>welfare</a:t>
             </a:r>
           </a:p>
           <a:p xmlns:a="http://schemas.openxmlformats.org/drawingml/2006/main">
@@ -1811,7 +1811,7 @@
                   <a:srgbClr val="15375F"/>
                 </a:solidFill>
               </a:rPr>
-              <a:t>改判 80</a:t>
+              <a:t>Change the sentence 80</a:t>
             </a:r>
           </a:p>
         </p:txBody>
@@ -1867,7 +1867,7 @@
                   <a:srgbClr val="15375F"/>
                 </a:solidFill>
               </a:rPr>
-              <a:t>福利</a:t>
+              <a:t>welfare</a:t>
             </a:r>
           </a:p>
           <a:p xmlns:a="http://schemas.openxmlformats.org/drawingml/2006/main">
@@ -1940,7 +1940,7 @@
                   <a:srgbClr val="15375F"/>
                 </a:solidFill>
               </a:rPr>
-              <a:t>休假</a:t>
+              <a:t>vacation</a:t>
             </a:r>
           </a:p>
           <a:p xmlns:a="http://schemas.openxmlformats.org/drawingml/2006/main">
@@ -2030,7 +2030,7 @@
                   <a:srgbClr val="15375F"/>
                 </a:solidFill>
               </a:rPr>
-              <a:t>改判 70</a:t>
+              <a:t>Change the sentence 70</a:t>
             </a:r>
           </a:p>
         </p:txBody>
@@ -2086,7 +2086,7 @@
                   <a:srgbClr val="15375F"/>
                 </a:solidFill>
               </a:rPr>
-              <a:t>休假</a:t>
+              <a:t>vacation</a:t>
             </a:r>
           </a:p>
           <a:p xmlns:a="http://schemas.openxmlformats.org/drawingml/2006/main">
@@ -2159,7 +2159,7 @@
                   <a:srgbClr val="15375F"/>
                 </a:solidFill>
               </a:rPr>
-              <a:t>证明</a:t>
+              <a:t>prove</a:t>
             </a:r>
           </a:p>
           <a:p xmlns:a="http://schemas.openxmlformats.org/drawingml/2006/main">
@@ -2249,7 +2249,7 @@
                   <a:srgbClr val="15375F"/>
                 </a:solidFill>
               </a:rPr>
-              <a:t>改判 100</a:t>
+              <a:t>Change the sentence 100</a:t>
             </a:r>
           </a:p>
         </p:txBody>
@@ -2305,7 +2305,7 @@
                   <a:srgbClr val="15375F"/>
                 </a:solidFill>
               </a:rPr>
-              <a:t>证明</a:t>
+              <a:t>prove</a:t>
             </a:r>
           </a:p>
           <a:p xmlns:a="http://schemas.openxmlformats.org/drawingml/2006/main">
@@ -2378,7 +2378,7 @@
                   <a:srgbClr val="15375F"/>
                 </a:solidFill>
               </a:rPr>
-              <a:t>其他</a:t>
+              <a:t>Others</a:t>
             </a:r>
           </a:p>
           <a:p xmlns:a="http://schemas.openxmlformats.org/drawingml/2006/main">
@@ -2468,7 +2468,7 @@
                   <a:srgbClr val="E8872D"/>
                 </a:solidFill>
               </a:rPr>
-              <a:t>改判 450</a:t>
+              <a:t>Change the sentence 450</a:t>
             </a:r>
           </a:p>
         </p:txBody>
@@ -2524,7 +2524,7 @@
                   <a:srgbClr val="15375F"/>
                 </a:solidFill>
               </a:rPr>
-              <a:t>其他</a:t>
+              <a:t>Others</a:t>
             </a:r>
           </a:p>
           <a:p xmlns:a="http://schemas.openxmlformats.org/drawingml/2006/main">
@@ -2595,14 +2595,14 @@
                   <a:srgbClr val="E8872D"/>
                 </a:solidFill>
               </a:rPr>
-              <a:t>其他｜建议拆成 3 个末级标签</a:t>
+              <a:t>Others｜It is recommended to split it into 3 last-level tags</a:t>
             </a:r>
           </a:p>
         </p:txBody>
       </p:sp>
       <p:sp>
         <p:nvSpPr>
-          <p:cNvPr id="33" name="发现／根因／动作-rail">
+          <p:cNvPr id="33" name="discover／root cause／action-rail">
             <a:extLst xmlns:a="http://schemas.openxmlformats.org/drawingml/2006/main">
               <a:ext uri="{FF2B5EF4-FFF2-40B4-BE49-F238E27FC236}">
                 <a16:creationId xmlns:a16="http://schemas.microsoft.com/office/drawing/2014/main" id="{BDDBECDC-30E6-4384-A234-B1B33D05B46B}"/>
@@ -2637,7 +2637,7 @@
       </p:sp>
       <p:sp>
         <p:nvSpPr>
-          <p:cNvPr id="34" name="发现／根因／动作-title">
+          <p:cNvPr id="34" name="discover／root cause／action-title">
             <a:extLst xmlns:a="http://schemas.openxmlformats.org/drawingml/2006/main">
               <a:ext uri="{FF2B5EF4-FFF2-40B4-BE49-F238E27FC236}">
                 <a16:creationId xmlns:a16="http://schemas.microsoft.com/office/drawing/2014/main" id="{EABEB8A9-E90E-498D-9832-82FC4CD014B5}"/>
@@ -2680,14 +2680,14 @@
                   <a:srgbClr val="15375F"/>
                 </a:solidFill>
               </a:rPr>
-              <a:t>发现／根因／动作</a:t>
+              <a:t>discover／root cause／action</a:t>
             </a:r>
           </a:p>
         </p:txBody>
       </p:sp>
       <p:sp>
         <p:nvSpPr>
-          <p:cNvPr id="35" name="发现／根因／动作-1">
+          <p:cNvPr id="35" name="discover／root cause／action-1">
             <a:extLst xmlns:a="http://schemas.openxmlformats.org/drawingml/2006/main">
               <a:ext uri="{FF2B5EF4-FFF2-40B4-BE49-F238E27FC236}">
                 <a16:creationId xmlns:a16="http://schemas.microsoft.com/office/drawing/2014/main" id="{89E39F81-01FC-4E16-B31C-173933EFF1F5}"/>
@@ -2736,14 +2736,14 @@
                   <a:srgbClr val="172033"/>
                 </a:solidFill>
               </a:rPr>
-              <a:t>1  其他标签接收了最多错误流入</a:t>
+              <a:t>1  Other tags received the most error inflows</a:t>
             </a:r>
           </a:p>
         </p:txBody>
       </p:sp>
       <p:sp>
         <p:nvSpPr>
-          <p:cNvPr id="36" name="发现／根因／动作-2">
+          <p:cNvPr id="36" name="discover／root cause／action-2">
             <a:extLst xmlns:a="http://schemas.openxmlformats.org/drawingml/2006/main">
               <a:ext uri="{FF2B5EF4-FFF2-40B4-BE49-F238E27FC236}">
                 <a16:creationId xmlns:a16="http://schemas.microsoft.com/office/drawing/2014/main" id="{53E7CD1A-219A-46C5-9C13-215416D9A1DF}"/>
@@ -2792,14 +2792,14 @@
                   <a:srgbClr val="172033"/>
                 </a:solidFill>
               </a:rPr>
-              <a:t>2  薪资与证明之间存在稳定混淆</a:t>
+              <a:t>2  Stable confusion between salary and certification</a:t>
             </a:r>
           </a:p>
         </p:txBody>
       </p:sp>
       <p:sp>
         <p:nvSpPr>
-          <p:cNvPr id="37" name="发现／根因／动作-3">
+          <p:cNvPr id="37" name="discover／root cause／action-3">
             <a:extLst xmlns:a="http://schemas.openxmlformats.org/drawingml/2006/main">
               <a:ext uri="{FF2B5EF4-FFF2-40B4-BE49-F238E27FC236}">
                 <a16:creationId xmlns:a16="http://schemas.microsoft.com/office/drawing/2014/main" id="{A1B972BB-CB2E-4164-8FFB-F882F36DB020}"/>
@@ -2848,7 +2848,7 @@
                   <a:srgbClr val="172033"/>
                 </a:solidFill>
               </a:rPr>
-              <a:t>3  新增末级标签并补充训练样本</a:t>
+              <a:t>3  Add final labels and supplement training samples</a:t>
             </a:r>
           </a:p>
         </p:txBody>
@@ -2904,7 +2904,7 @@
                   <a:srgbClr val="15375F"/>
                 </a:solidFill>
               </a:rPr>
-              <a:t>每万件工单减少 550 次改判，目标准确率提升至 92%</a:t>
+              <a:t>Reduction in work orders per 10,000 pieces 550 The judgment was revised once, and the target accuracy rate increased to 92%</a:t>
             </a:r>
           </a:p>
         </p:txBody>
